--- a/Dokumentacio/Calentasker_bemutató.pptx
+++ b/Dokumentacio/Calentasker_bemutató.pptx
@@ -15,6 +15,7 @@
     <p:sldId id="263" r:id="rId9"/>
     <p:sldId id="264" r:id="rId10"/>
     <p:sldId id="265" r:id="rId11"/>
+    <p:sldId id="266" r:id="rId12"/>
   </p:sldIdLst>
   <p:sldSz cx="12192000" cy="6858000"/>
   <p:notesSz cx="6858000" cy="9144000"/>
@@ -113,6 +114,11 @@
       </a:defRPr>
     </a:lvl9pPr>
   </p:defaultTextStyle>
+  <p:extLst>
+    <p:ext uri="{EFAFB233-063F-42B5-8137-9DF3F51BA10A}">
+      <p15:sldGuideLst xmlns:p15="http://schemas.microsoft.com/office/powerpoint/2012/main"/>
+    </p:ext>
+  </p:extLst>
 </p:presentation>
 </file>
 
@@ -265,7 +271,7 @@
           <a:p>
             <a:fld id="{E0489980-8C40-4A7C-B87C-A79389D5BD9E}" type="datetimeFigureOut">
               <a:rPr lang="en-US" smtClean="0"/>
-              <a:t>3/5/2026</a:t>
+              <a:t>3/6/2026</a:t>
             </a:fld>
             <a:endParaRPr lang="en-US"/>
           </a:p>
@@ -465,7 +471,7 @@
           <a:p>
             <a:fld id="{E0489980-8C40-4A7C-B87C-A79389D5BD9E}" type="datetimeFigureOut">
               <a:rPr lang="en-US" smtClean="0"/>
-              <a:t>3/5/2026</a:t>
+              <a:t>3/6/2026</a:t>
             </a:fld>
             <a:endParaRPr lang="en-US"/>
           </a:p>
@@ -675,7 +681,7 @@
           <a:p>
             <a:fld id="{E0489980-8C40-4A7C-B87C-A79389D5BD9E}" type="datetimeFigureOut">
               <a:rPr lang="en-US" smtClean="0"/>
-              <a:t>3/5/2026</a:t>
+              <a:t>3/6/2026</a:t>
             </a:fld>
             <a:endParaRPr lang="en-US"/>
           </a:p>
@@ -875,7 +881,7 @@
           <a:p>
             <a:fld id="{E0489980-8C40-4A7C-B87C-A79389D5BD9E}" type="datetimeFigureOut">
               <a:rPr lang="en-US" smtClean="0"/>
-              <a:t>3/5/2026</a:t>
+              <a:t>3/6/2026</a:t>
             </a:fld>
             <a:endParaRPr lang="en-US"/>
           </a:p>
@@ -1151,7 +1157,7 @@
           <a:p>
             <a:fld id="{E0489980-8C40-4A7C-B87C-A79389D5BD9E}" type="datetimeFigureOut">
               <a:rPr lang="en-US" smtClean="0"/>
-              <a:t>3/5/2026</a:t>
+              <a:t>3/6/2026</a:t>
             </a:fld>
             <a:endParaRPr lang="en-US"/>
           </a:p>
@@ -1419,7 +1425,7 @@
           <a:p>
             <a:fld id="{E0489980-8C40-4A7C-B87C-A79389D5BD9E}" type="datetimeFigureOut">
               <a:rPr lang="en-US" smtClean="0"/>
-              <a:t>3/5/2026</a:t>
+              <a:t>3/6/2026</a:t>
             </a:fld>
             <a:endParaRPr lang="en-US"/>
           </a:p>
@@ -1834,7 +1840,7 @@
           <a:p>
             <a:fld id="{E0489980-8C40-4A7C-B87C-A79389D5BD9E}" type="datetimeFigureOut">
               <a:rPr lang="en-US" smtClean="0"/>
-              <a:t>3/5/2026</a:t>
+              <a:t>3/6/2026</a:t>
             </a:fld>
             <a:endParaRPr lang="en-US"/>
           </a:p>
@@ -1976,7 +1982,7 @@
           <a:p>
             <a:fld id="{E0489980-8C40-4A7C-B87C-A79389D5BD9E}" type="datetimeFigureOut">
               <a:rPr lang="en-US" smtClean="0"/>
-              <a:t>3/5/2026</a:t>
+              <a:t>3/6/2026</a:t>
             </a:fld>
             <a:endParaRPr lang="en-US"/>
           </a:p>
@@ -2089,7 +2095,7 @@
           <a:p>
             <a:fld id="{E0489980-8C40-4A7C-B87C-A79389D5BD9E}" type="datetimeFigureOut">
               <a:rPr lang="en-US" smtClean="0"/>
-              <a:t>3/5/2026</a:t>
+              <a:t>3/6/2026</a:t>
             </a:fld>
             <a:endParaRPr lang="en-US"/>
           </a:p>
@@ -2402,7 +2408,7 @@
           <a:p>
             <a:fld id="{E0489980-8C40-4A7C-B87C-A79389D5BD9E}" type="datetimeFigureOut">
               <a:rPr lang="en-US" smtClean="0"/>
-              <a:t>3/5/2026</a:t>
+              <a:t>3/6/2026</a:t>
             </a:fld>
             <a:endParaRPr lang="en-US"/>
           </a:p>
@@ -2691,7 +2697,7 @@
           <a:p>
             <a:fld id="{E0489980-8C40-4A7C-B87C-A79389D5BD9E}" type="datetimeFigureOut">
               <a:rPr lang="en-US" smtClean="0"/>
-              <a:t>3/5/2026</a:t>
+              <a:t>3/6/2026</a:t>
             </a:fld>
             <a:endParaRPr lang="en-US"/>
           </a:p>
@@ -2934,7 +2940,7 @@
           <a:p>
             <a:fld id="{E0489980-8C40-4A7C-B87C-A79389D5BD9E}" type="datetimeFigureOut">
               <a:rPr lang="en-US" smtClean="0"/>
-              <a:t>3/5/2026</a:t>
+              <a:t>3/6/2026</a:t>
             </a:fld>
             <a:endParaRPr lang="en-US"/>
           </a:p>
@@ -3538,8 +3544,8 @@
         </p:nvSpPr>
         <p:spPr>
           <a:xfrm>
-            <a:off x="7080738" y="3800209"/>
-            <a:ext cx="4467792" cy="2410198"/>
+            <a:off x="7080738" y="1098817"/>
+            <a:ext cx="4467792" cy="439270"/>
           </a:xfrm>
         </p:spPr>
         <p:txBody>
@@ -3549,13 +3555,18 @@
           <a:lstStyle/>
           <a:p>
             <a:r>
-              <a:rPr lang="en-US">
+              <a:rPr lang="hu-HU" dirty="0">
                 <a:solidFill>
                   <a:srgbClr val="FFFFFF"/>
                 </a:solidFill>
               </a:rPr>
-              <a:t>Készítették: Fesető Imre, Kapus Kamill Kevin</a:t>
-            </a:r>
+              <a:t>Készítették:</a:t>
+            </a:r>
+            <a:endParaRPr lang="en-US" dirty="0">
+              <a:solidFill>
+                <a:srgbClr val="FFFFFF"/>
+              </a:solidFill>
+            </a:endParaRPr>
           </a:p>
         </p:txBody>
       </p:sp>
@@ -3702,6 +3713,458 @@
           </a:custGeom>
         </p:spPr>
       </p:pic>
+      <p:pic>
+        <p:nvPicPr>
+          <p:cNvPr id="4" name="Kép 3">
+            <a:extLst>
+              <a:ext uri="{FF2B5EF4-FFF2-40B4-BE49-F238E27FC236}">
+                <a16:creationId xmlns:a16="http://schemas.microsoft.com/office/drawing/2014/main" id="{05E264C1-8C10-4C84-9B3F-8A527F44BA54}"/>
+              </a:ext>
+            </a:extLst>
+          </p:cNvPr>
+          <p:cNvPicPr>
+            <a:picLocks noChangeAspect="1"/>
+          </p:cNvPicPr>
+          <p:nvPr/>
+        </p:nvPicPr>
+        <p:blipFill>
+          <a:blip r:embed="rId4">
+            <a:extLst>
+              <a:ext uri="{28A0092B-C50C-407E-A947-70E740481C1C}">
+                <a14:useLocalDpi xmlns:a14="http://schemas.microsoft.com/office/drawing/2010/main" val="0"/>
+              </a:ext>
+            </a:extLst>
+          </a:blip>
+          <a:stretch>
+            <a:fillRect/>
+          </a:stretch>
+        </p:blipFill>
+        <p:spPr>
+          <a:xfrm>
+            <a:off x="7203738" y="1662014"/>
+            <a:ext cx="2012284" cy="2980737"/>
+          </a:xfrm>
+          <a:prstGeom prst="rect">
+            <a:avLst/>
+          </a:prstGeom>
+        </p:spPr>
+      </p:pic>
+      <p:sp>
+        <p:nvSpPr>
+          <p:cNvPr id="9" name="Alcím 2">
+            <a:extLst>
+              <a:ext uri="{FF2B5EF4-FFF2-40B4-BE49-F238E27FC236}">
+                <a16:creationId xmlns:a16="http://schemas.microsoft.com/office/drawing/2014/main" id="{834699FE-3646-4E2F-A870-49DC649969A5}"/>
+              </a:ext>
+            </a:extLst>
+          </p:cNvPr>
+          <p:cNvSpPr txBox="1">
+            <a:spLocks/>
+          </p:cNvSpPr>
+          <p:nvPr/>
+        </p:nvSpPr>
+        <p:spPr>
+          <a:xfrm>
+            <a:off x="7203738" y="4675320"/>
+            <a:ext cx="2012284" cy="335951"/>
+          </a:xfrm>
+          <a:prstGeom prst="rect">
+            <a:avLst/>
+          </a:prstGeom>
+        </p:spPr>
+        <p:txBody>
+          <a:bodyPr vert="horz" lIns="91440" tIns="45720" rIns="91440" bIns="45720" rtlCol="0">
+            <a:normAutofit/>
+          </a:bodyPr>
+          <a:lstStyle>
+            <a:lvl1pPr marL="0" indent="0" algn="ctr" defTabSz="914400" rtl="0" eaLnBrk="1" latinLnBrk="0" hangingPunct="1">
+              <a:lnSpc>
+                <a:spcPct val="90000"/>
+              </a:lnSpc>
+              <a:spcBef>
+                <a:spcPts val="1000"/>
+              </a:spcBef>
+              <a:buFont typeface="Arial" panose="020B0604020202020204" pitchFamily="34" charset="0"/>
+              <a:buNone/>
+              <a:defRPr sz="2400" kern="1200">
+                <a:solidFill>
+                  <a:schemeClr val="tx1"/>
+                </a:solidFill>
+                <a:latin typeface="+mn-lt"/>
+                <a:ea typeface="+mn-ea"/>
+                <a:cs typeface="+mn-cs"/>
+              </a:defRPr>
+            </a:lvl1pPr>
+            <a:lvl2pPr marL="457200" indent="0" algn="ctr" defTabSz="914400" rtl="0" eaLnBrk="1" latinLnBrk="0" hangingPunct="1">
+              <a:lnSpc>
+                <a:spcPct val="90000"/>
+              </a:lnSpc>
+              <a:spcBef>
+                <a:spcPts val="500"/>
+              </a:spcBef>
+              <a:buFont typeface="Arial" panose="020B0604020202020204" pitchFamily="34" charset="0"/>
+              <a:buNone/>
+              <a:defRPr sz="2000" kern="1200">
+                <a:solidFill>
+                  <a:schemeClr val="tx1"/>
+                </a:solidFill>
+                <a:latin typeface="+mn-lt"/>
+                <a:ea typeface="+mn-ea"/>
+                <a:cs typeface="+mn-cs"/>
+              </a:defRPr>
+            </a:lvl2pPr>
+            <a:lvl3pPr marL="914400" indent="0" algn="ctr" defTabSz="914400" rtl="0" eaLnBrk="1" latinLnBrk="0" hangingPunct="1">
+              <a:lnSpc>
+                <a:spcPct val="90000"/>
+              </a:lnSpc>
+              <a:spcBef>
+                <a:spcPts val="500"/>
+              </a:spcBef>
+              <a:buFont typeface="Arial" panose="020B0604020202020204" pitchFamily="34" charset="0"/>
+              <a:buNone/>
+              <a:defRPr sz="1800" kern="1200">
+                <a:solidFill>
+                  <a:schemeClr val="tx1"/>
+                </a:solidFill>
+                <a:latin typeface="+mn-lt"/>
+                <a:ea typeface="+mn-ea"/>
+                <a:cs typeface="+mn-cs"/>
+              </a:defRPr>
+            </a:lvl3pPr>
+            <a:lvl4pPr marL="1371600" indent="0" algn="ctr" defTabSz="914400" rtl="0" eaLnBrk="1" latinLnBrk="0" hangingPunct="1">
+              <a:lnSpc>
+                <a:spcPct val="90000"/>
+              </a:lnSpc>
+              <a:spcBef>
+                <a:spcPts val="500"/>
+              </a:spcBef>
+              <a:buFont typeface="Arial" panose="020B0604020202020204" pitchFamily="34" charset="0"/>
+              <a:buNone/>
+              <a:defRPr sz="1600" kern="1200">
+                <a:solidFill>
+                  <a:schemeClr val="tx1"/>
+                </a:solidFill>
+                <a:latin typeface="+mn-lt"/>
+                <a:ea typeface="+mn-ea"/>
+                <a:cs typeface="+mn-cs"/>
+              </a:defRPr>
+            </a:lvl4pPr>
+            <a:lvl5pPr marL="1828800" indent="0" algn="ctr" defTabSz="914400" rtl="0" eaLnBrk="1" latinLnBrk="0" hangingPunct="1">
+              <a:lnSpc>
+                <a:spcPct val="90000"/>
+              </a:lnSpc>
+              <a:spcBef>
+                <a:spcPts val="500"/>
+              </a:spcBef>
+              <a:buFont typeface="Arial" panose="020B0604020202020204" pitchFamily="34" charset="0"/>
+              <a:buNone/>
+              <a:defRPr sz="1600" kern="1200">
+                <a:solidFill>
+                  <a:schemeClr val="tx1"/>
+                </a:solidFill>
+                <a:latin typeface="+mn-lt"/>
+                <a:ea typeface="+mn-ea"/>
+                <a:cs typeface="+mn-cs"/>
+              </a:defRPr>
+            </a:lvl5pPr>
+            <a:lvl6pPr marL="2286000" indent="0" algn="ctr" defTabSz="914400" rtl="0" eaLnBrk="1" latinLnBrk="0" hangingPunct="1">
+              <a:lnSpc>
+                <a:spcPct val="90000"/>
+              </a:lnSpc>
+              <a:spcBef>
+                <a:spcPts val="500"/>
+              </a:spcBef>
+              <a:buFont typeface="Arial" panose="020B0604020202020204" pitchFamily="34" charset="0"/>
+              <a:buNone/>
+              <a:defRPr sz="1600" kern="1200">
+                <a:solidFill>
+                  <a:schemeClr val="tx1"/>
+                </a:solidFill>
+                <a:latin typeface="+mn-lt"/>
+                <a:ea typeface="+mn-ea"/>
+                <a:cs typeface="+mn-cs"/>
+              </a:defRPr>
+            </a:lvl6pPr>
+            <a:lvl7pPr marL="2743200" indent="0" algn="ctr" defTabSz="914400" rtl="0" eaLnBrk="1" latinLnBrk="0" hangingPunct="1">
+              <a:lnSpc>
+                <a:spcPct val="90000"/>
+              </a:lnSpc>
+              <a:spcBef>
+                <a:spcPts val="500"/>
+              </a:spcBef>
+              <a:buFont typeface="Arial" panose="020B0604020202020204" pitchFamily="34" charset="0"/>
+              <a:buNone/>
+              <a:defRPr sz="1600" kern="1200">
+                <a:solidFill>
+                  <a:schemeClr val="tx1"/>
+                </a:solidFill>
+                <a:latin typeface="+mn-lt"/>
+                <a:ea typeface="+mn-ea"/>
+                <a:cs typeface="+mn-cs"/>
+              </a:defRPr>
+            </a:lvl7pPr>
+            <a:lvl8pPr marL="3200400" indent="0" algn="ctr" defTabSz="914400" rtl="0" eaLnBrk="1" latinLnBrk="0" hangingPunct="1">
+              <a:lnSpc>
+                <a:spcPct val="90000"/>
+              </a:lnSpc>
+              <a:spcBef>
+                <a:spcPts val="500"/>
+              </a:spcBef>
+              <a:buFont typeface="Arial" panose="020B0604020202020204" pitchFamily="34" charset="0"/>
+              <a:buNone/>
+              <a:defRPr sz="1600" kern="1200">
+                <a:solidFill>
+                  <a:schemeClr val="tx1"/>
+                </a:solidFill>
+                <a:latin typeface="+mn-lt"/>
+                <a:ea typeface="+mn-ea"/>
+                <a:cs typeface="+mn-cs"/>
+              </a:defRPr>
+            </a:lvl8pPr>
+            <a:lvl9pPr marL="3657600" indent="0" algn="ctr" defTabSz="914400" rtl="0" eaLnBrk="1" latinLnBrk="0" hangingPunct="1">
+              <a:lnSpc>
+                <a:spcPct val="90000"/>
+              </a:lnSpc>
+              <a:spcBef>
+                <a:spcPts val="500"/>
+              </a:spcBef>
+              <a:buFont typeface="Arial" panose="020B0604020202020204" pitchFamily="34" charset="0"/>
+              <a:buNone/>
+              <a:defRPr sz="1600" kern="1200">
+                <a:solidFill>
+                  <a:schemeClr val="tx1"/>
+                </a:solidFill>
+                <a:latin typeface="+mn-lt"/>
+                <a:ea typeface="+mn-ea"/>
+                <a:cs typeface="+mn-cs"/>
+              </a:defRPr>
+            </a:lvl9pPr>
+          </a:lstStyle>
+          <a:p>
+            <a:r>
+              <a:rPr lang="hu-HU" sz="1600" dirty="0">
+                <a:solidFill>
+                  <a:srgbClr val="FFFFFF"/>
+                </a:solidFill>
+              </a:rPr>
+              <a:t>Fesető Imre</a:t>
+            </a:r>
+            <a:endParaRPr lang="en-US" sz="1600" dirty="0">
+              <a:solidFill>
+                <a:srgbClr val="FFFFFF"/>
+              </a:solidFill>
+            </a:endParaRPr>
+          </a:p>
+        </p:txBody>
+      </p:sp>
+      <p:sp>
+        <p:nvSpPr>
+          <p:cNvPr id="10" name="Alcím 2">
+            <a:extLst>
+              <a:ext uri="{FF2B5EF4-FFF2-40B4-BE49-F238E27FC236}">
+                <a16:creationId xmlns:a16="http://schemas.microsoft.com/office/drawing/2014/main" id="{C17B1F76-80AF-4AF2-9D84-722FABB41011}"/>
+              </a:ext>
+            </a:extLst>
+          </p:cNvPr>
+          <p:cNvSpPr txBox="1">
+            <a:spLocks/>
+          </p:cNvSpPr>
+          <p:nvPr/>
+        </p:nvSpPr>
+        <p:spPr>
+          <a:xfrm>
+            <a:off x="9501451" y="4675320"/>
+            <a:ext cx="2012284" cy="335951"/>
+          </a:xfrm>
+          <a:prstGeom prst="rect">
+            <a:avLst/>
+          </a:prstGeom>
+        </p:spPr>
+        <p:txBody>
+          <a:bodyPr vert="horz" lIns="91440" tIns="45720" rIns="91440" bIns="45720" rtlCol="0">
+            <a:normAutofit/>
+          </a:bodyPr>
+          <a:lstStyle>
+            <a:lvl1pPr marL="0" indent="0" algn="ctr" defTabSz="914400" rtl="0" eaLnBrk="1" latinLnBrk="0" hangingPunct="1">
+              <a:lnSpc>
+                <a:spcPct val="90000"/>
+              </a:lnSpc>
+              <a:spcBef>
+                <a:spcPts val="1000"/>
+              </a:spcBef>
+              <a:buFont typeface="Arial" panose="020B0604020202020204" pitchFamily="34" charset="0"/>
+              <a:buNone/>
+              <a:defRPr sz="2400" kern="1200">
+                <a:solidFill>
+                  <a:schemeClr val="tx1"/>
+                </a:solidFill>
+                <a:latin typeface="+mn-lt"/>
+                <a:ea typeface="+mn-ea"/>
+                <a:cs typeface="+mn-cs"/>
+              </a:defRPr>
+            </a:lvl1pPr>
+            <a:lvl2pPr marL="457200" indent="0" algn="ctr" defTabSz="914400" rtl="0" eaLnBrk="1" latinLnBrk="0" hangingPunct="1">
+              <a:lnSpc>
+                <a:spcPct val="90000"/>
+              </a:lnSpc>
+              <a:spcBef>
+                <a:spcPts val="500"/>
+              </a:spcBef>
+              <a:buFont typeface="Arial" panose="020B0604020202020204" pitchFamily="34" charset="0"/>
+              <a:buNone/>
+              <a:defRPr sz="2000" kern="1200">
+                <a:solidFill>
+                  <a:schemeClr val="tx1"/>
+                </a:solidFill>
+                <a:latin typeface="+mn-lt"/>
+                <a:ea typeface="+mn-ea"/>
+                <a:cs typeface="+mn-cs"/>
+              </a:defRPr>
+            </a:lvl2pPr>
+            <a:lvl3pPr marL="914400" indent="0" algn="ctr" defTabSz="914400" rtl="0" eaLnBrk="1" latinLnBrk="0" hangingPunct="1">
+              <a:lnSpc>
+                <a:spcPct val="90000"/>
+              </a:lnSpc>
+              <a:spcBef>
+                <a:spcPts val="500"/>
+              </a:spcBef>
+              <a:buFont typeface="Arial" panose="020B0604020202020204" pitchFamily="34" charset="0"/>
+              <a:buNone/>
+              <a:defRPr sz="1800" kern="1200">
+                <a:solidFill>
+                  <a:schemeClr val="tx1"/>
+                </a:solidFill>
+                <a:latin typeface="+mn-lt"/>
+                <a:ea typeface="+mn-ea"/>
+                <a:cs typeface="+mn-cs"/>
+              </a:defRPr>
+            </a:lvl3pPr>
+            <a:lvl4pPr marL="1371600" indent="0" algn="ctr" defTabSz="914400" rtl="0" eaLnBrk="1" latinLnBrk="0" hangingPunct="1">
+              <a:lnSpc>
+                <a:spcPct val="90000"/>
+              </a:lnSpc>
+              <a:spcBef>
+                <a:spcPts val="500"/>
+              </a:spcBef>
+              <a:buFont typeface="Arial" panose="020B0604020202020204" pitchFamily="34" charset="0"/>
+              <a:buNone/>
+              <a:defRPr sz="1600" kern="1200">
+                <a:solidFill>
+                  <a:schemeClr val="tx1"/>
+                </a:solidFill>
+                <a:latin typeface="+mn-lt"/>
+                <a:ea typeface="+mn-ea"/>
+                <a:cs typeface="+mn-cs"/>
+              </a:defRPr>
+            </a:lvl4pPr>
+            <a:lvl5pPr marL="1828800" indent="0" algn="ctr" defTabSz="914400" rtl="0" eaLnBrk="1" latinLnBrk="0" hangingPunct="1">
+              <a:lnSpc>
+                <a:spcPct val="90000"/>
+              </a:lnSpc>
+              <a:spcBef>
+                <a:spcPts val="500"/>
+              </a:spcBef>
+              <a:buFont typeface="Arial" panose="020B0604020202020204" pitchFamily="34" charset="0"/>
+              <a:buNone/>
+              <a:defRPr sz="1600" kern="1200">
+                <a:solidFill>
+                  <a:schemeClr val="tx1"/>
+                </a:solidFill>
+                <a:latin typeface="+mn-lt"/>
+                <a:ea typeface="+mn-ea"/>
+                <a:cs typeface="+mn-cs"/>
+              </a:defRPr>
+            </a:lvl5pPr>
+            <a:lvl6pPr marL="2286000" indent="0" algn="ctr" defTabSz="914400" rtl="0" eaLnBrk="1" latinLnBrk="0" hangingPunct="1">
+              <a:lnSpc>
+                <a:spcPct val="90000"/>
+              </a:lnSpc>
+              <a:spcBef>
+                <a:spcPts val="500"/>
+              </a:spcBef>
+              <a:buFont typeface="Arial" panose="020B0604020202020204" pitchFamily="34" charset="0"/>
+              <a:buNone/>
+              <a:defRPr sz="1600" kern="1200">
+                <a:solidFill>
+                  <a:schemeClr val="tx1"/>
+                </a:solidFill>
+                <a:latin typeface="+mn-lt"/>
+                <a:ea typeface="+mn-ea"/>
+                <a:cs typeface="+mn-cs"/>
+              </a:defRPr>
+            </a:lvl6pPr>
+            <a:lvl7pPr marL="2743200" indent="0" algn="ctr" defTabSz="914400" rtl="0" eaLnBrk="1" latinLnBrk="0" hangingPunct="1">
+              <a:lnSpc>
+                <a:spcPct val="90000"/>
+              </a:lnSpc>
+              <a:spcBef>
+                <a:spcPts val="500"/>
+              </a:spcBef>
+              <a:buFont typeface="Arial" panose="020B0604020202020204" pitchFamily="34" charset="0"/>
+              <a:buNone/>
+              <a:defRPr sz="1600" kern="1200">
+                <a:solidFill>
+                  <a:schemeClr val="tx1"/>
+                </a:solidFill>
+                <a:latin typeface="+mn-lt"/>
+                <a:ea typeface="+mn-ea"/>
+                <a:cs typeface="+mn-cs"/>
+              </a:defRPr>
+            </a:lvl7pPr>
+            <a:lvl8pPr marL="3200400" indent="0" algn="ctr" defTabSz="914400" rtl="0" eaLnBrk="1" latinLnBrk="0" hangingPunct="1">
+              <a:lnSpc>
+                <a:spcPct val="90000"/>
+              </a:lnSpc>
+              <a:spcBef>
+                <a:spcPts val="500"/>
+              </a:spcBef>
+              <a:buFont typeface="Arial" panose="020B0604020202020204" pitchFamily="34" charset="0"/>
+              <a:buNone/>
+              <a:defRPr sz="1600" kern="1200">
+                <a:solidFill>
+                  <a:schemeClr val="tx1"/>
+                </a:solidFill>
+                <a:latin typeface="+mn-lt"/>
+                <a:ea typeface="+mn-ea"/>
+                <a:cs typeface="+mn-cs"/>
+              </a:defRPr>
+            </a:lvl8pPr>
+            <a:lvl9pPr marL="3657600" indent="0" algn="ctr" defTabSz="914400" rtl="0" eaLnBrk="1" latinLnBrk="0" hangingPunct="1">
+              <a:lnSpc>
+                <a:spcPct val="90000"/>
+              </a:lnSpc>
+              <a:spcBef>
+                <a:spcPts val="500"/>
+              </a:spcBef>
+              <a:buFont typeface="Arial" panose="020B0604020202020204" pitchFamily="34" charset="0"/>
+              <a:buNone/>
+              <a:defRPr sz="1600" kern="1200">
+                <a:solidFill>
+                  <a:schemeClr val="tx1"/>
+                </a:solidFill>
+                <a:latin typeface="+mn-lt"/>
+                <a:ea typeface="+mn-ea"/>
+                <a:cs typeface="+mn-cs"/>
+              </a:defRPr>
+            </a:lvl9pPr>
+          </a:lstStyle>
+          <a:p>
+            <a:r>
+              <a:rPr lang="hu-HU" sz="1600" dirty="0">
+                <a:solidFill>
+                  <a:srgbClr val="FFFFFF"/>
+                </a:solidFill>
+              </a:rPr>
+              <a:t>Kapus Kamill Kevin</a:t>
+            </a:r>
+            <a:endParaRPr lang="en-US" sz="1600" dirty="0">
+              <a:solidFill>
+                <a:srgbClr val="FFFFFF"/>
+              </a:solidFill>
+            </a:endParaRPr>
+          </a:p>
+        </p:txBody>
+      </p:sp>
     </p:spTree>
     <p:extLst>
       <p:ext uri="{BB962C8B-B14F-4D97-AF65-F5344CB8AC3E}">
@@ -4194,6 +4657,89 @@
 </p:sld>
 </file>
 
+<file path=ppt/slides/slide11.xml><?xml version="1.0" encoding="utf-8"?>
+<p:sld xmlns:a="http://schemas.openxmlformats.org/drawingml/2006/main" xmlns:r="http://schemas.openxmlformats.org/officeDocument/2006/relationships" xmlns:p="http://schemas.openxmlformats.org/presentationml/2006/main">
+  <p:cSld>
+    <p:spTree>
+      <p:nvGrpSpPr>
+        <p:cNvPr id="1" name=""/>
+        <p:cNvGrpSpPr/>
+        <p:nvPr/>
+      </p:nvGrpSpPr>
+      <p:grpSpPr>
+        <a:xfrm>
+          <a:off x="0" y="0"/>
+          <a:ext cx="0" cy="0"/>
+          <a:chOff x="0" y="0"/>
+          <a:chExt cx="0" cy="0"/>
+        </a:xfrm>
+      </p:grpSpPr>
+      <p:sp>
+        <p:nvSpPr>
+          <p:cNvPr id="2" name="Cím 1">
+            <a:extLst>
+              <a:ext uri="{FF2B5EF4-FFF2-40B4-BE49-F238E27FC236}">
+                <a16:creationId xmlns:a16="http://schemas.microsoft.com/office/drawing/2014/main" id="{2B1919FD-FE43-43ED-99B6-7CB54C1AB22E}"/>
+              </a:ext>
+            </a:extLst>
+          </p:cNvPr>
+          <p:cNvSpPr>
+            <a:spLocks noGrp="1"/>
+          </p:cNvSpPr>
+          <p:nvPr>
+            <p:ph type="ctrTitle"/>
+          </p:nvPr>
+        </p:nvSpPr>
+        <p:spPr/>
+        <p:txBody>
+          <a:bodyPr/>
+          <a:lstStyle/>
+          <a:p>
+            <a:r>
+              <a:rPr lang="hu-HU" dirty="0"/>
+              <a:t>Köszönjük a figyelmet</a:t>
+            </a:r>
+          </a:p>
+        </p:txBody>
+      </p:sp>
+      <p:sp>
+        <p:nvSpPr>
+          <p:cNvPr id="4" name="Alcím 3">
+            <a:extLst>
+              <a:ext uri="{FF2B5EF4-FFF2-40B4-BE49-F238E27FC236}">
+                <a16:creationId xmlns:a16="http://schemas.microsoft.com/office/drawing/2014/main" id="{EA149B55-F0C2-476F-BFEB-37E68CEB0467}"/>
+              </a:ext>
+            </a:extLst>
+          </p:cNvPr>
+          <p:cNvSpPr>
+            <a:spLocks noGrp="1"/>
+          </p:cNvSpPr>
+          <p:nvPr>
+            <p:ph type="subTitle" idx="1"/>
+          </p:nvPr>
+        </p:nvSpPr>
+        <p:spPr/>
+        <p:txBody>
+          <a:bodyPr/>
+          <a:lstStyle/>
+          <a:p>
+            <a:endParaRPr lang="hu-HU"/>
+          </a:p>
+        </p:txBody>
+      </p:sp>
+    </p:spTree>
+    <p:extLst>
+      <p:ext uri="{BB962C8B-B14F-4D97-AF65-F5344CB8AC3E}">
+        <p14:creationId xmlns:p14="http://schemas.microsoft.com/office/powerpoint/2010/main" val="3590474955"/>
+      </p:ext>
+    </p:extLst>
+  </p:cSld>
+  <p:clrMapOvr>
+    <a:masterClrMapping/>
+  </p:clrMapOvr>
+</p:sld>
+</file>
+
 <file path=ppt/slides/slide2.xml><?xml version="1.0" encoding="utf-8"?>
 <p:sld xmlns:a="http://schemas.openxmlformats.org/drawingml/2006/main" xmlns:r="http://schemas.openxmlformats.org/officeDocument/2006/relationships" xmlns:p="http://schemas.openxmlformats.org/presentationml/2006/main">
   <p:cSld>
@@ -4513,31 +5059,115 @@
           </a:p>
         </p:txBody>
       </p:sp>
-      <p:sp>
-        <p:nvSpPr>
-          <p:cNvPr id="3" name="Tartalom helye 2">
-            <a:extLst>
-              <a:ext uri="{FF2B5EF4-FFF2-40B4-BE49-F238E27FC236}">
-                <a16:creationId xmlns:a16="http://schemas.microsoft.com/office/drawing/2014/main" id="{B8492F3E-4C9A-B470-2734-12545BC71A53}"/>
-              </a:ext>
-            </a:extLst>
-          </p:cNvPr>
-          <p:cNvSpPr>
-            <a:spLocks noGrp="1"/>
-          </p:cNvSpPr>
-          <p:nvPr>
-            <p:ph idx="1"/>
-          </p:nvPr>
-        </p:nvSpPr>
+      <p:pic>
+        <p:nvPicPr>
+          <p:cNvPr id="5" name="Kép 4">
+            <a:extLst>
+              <a:ext uri="{FF2B5EF4-FFF2-40B4-BE49-F238E27FC236}">
+                <a16:creationId xmlns:a16="http://schemas.microsoft.com/office/drawing/2014/main" id="{645DC2CF-2687-4F0C-94CB-34C91A014DC3}"/>
+              </a:ext>
+            </a:extLst>
+          </p:cNvPr>
+          <p:cNvPicPr>
+            <a:picLocks noChangeAspect="1"/>
+          </p:cNvPicPr>
+          <p:nvPr/>
+        </p:nvPicPr>
+        <p:blipFill>
+          <a:blip r:embed="rId2"/>
+          <a:stretch>
+            <a:fillRect/>
+          </a:stretch>
+        </p:blipFill>
         <p:spPr>
           <a:xfrm>
-            <a:off x="4571020" y="591343"/>
-            <a:ext cx="6906491" cy="5585619"/>
+            <a:off x="4851058" y="319088"/>
+            <a:ext cx="6266475" cy="2876897"/>
+          </a:xfrm>
+          <a:prstGeom prst="rect">
+            <a:avLst/>
+          </a:prstGeom>
+          <a:gradFill flip="none" rotWithShape="1">
+            <a:gsLst>
+              <a:gs pos="0">
+                <a:schemeClr val="accent1">
+                  <a:alpha val="1000"/>
+                  <a:lumMod val="0"/>
+                  <a:lumOff val="100000"/>
+                </a:schemeClr>
+              </a:gs>
+              <a:gs pos="74000">
+                <a:schemeClr val="accent1">
+                  <a:lumMod val="45000"/>
+                  <a:lumOff val="55000"/>
+                </a:schemeClr>
+              </a:gs>
+              <a:gs pos="83000">
+                <a:schemeClr val="accent1">
+                  <a:lumMod val="45000"/>
+                  <a:lumOff val="55000"/>
+                </a:schemeClr>
+              </a:gs>
+              <a:gs pos="100000">
+                <a:schemeClr val="accent1">
+                  <a:lumMod val="30000"/>
+                  <a:lumOff val="70000"/>
+                </a:schemeClr>
+              </a:gs>
+            </a:gsLst>
+            <a:lin ang="16200000" scaled="1"/>
+            <a:tileRect/>
+          </a:gradFill>
+          <a:ln w="47625" cap="rnd">
+            <a:gradFill>
+              <a:gsLst>
+                <a:gs pos="0">
+                  <a:schemeClr val="accent1">
+                    <a:lumMod val="5000"/>
+                    <a:lumOff val="95000"/>
+                  </a:schemeClr>
+                </a:gs>
+                <a:gs pos="32000">
+                  <a:schemeClr val="accent2"/>
+                </a:gs>
+                <a:gs pos="72000">
+                  <a:schemeClr val="accent2"/>
+                </a:gs>
+                <a:gs pos="100000">
+                  <a:schemeClr val="bg1"/>
+                </a:gs>
+              </a:gsLst>
+              <a:lin ang="7200000" scaled="0"/>
+            </a:gradFill>
+          </a:ln>
+          <a:effectLst/>
+        </p:spPr>
+      </p:pic>
+      <p:sp>
+        <p:nvSpPr>
+          <p:cNvPr id="3" name="Tartalom helye 2">
+            <a:extLst>
+              <a:ext uri="{FF2B5EF4-FFF2-40B4-BE49-F238E27FC236}">
+                <a16:creationId xmlns:a16="http://schemas.microsoft.com/office/drawing/2014/main" id="{B8492F3E-4C9A-B470-2734-12545BC71A53}"/>
+              </a:ext>
+            </a:extLst>
+          </p:cNvPr>
+          <p:cNvSpPr>
+            <a:spLocks noGrp="1"/>
+          </p:cNvSpPr>
+          <p:nvPr>
+            <p:ph idx="1"/>
+          </p:nvPr>
+        </p:nvSpPr>
+        <p:spPr>
+          <a:xfrm>
+            <a:off x="4571020" y="3300064"/>
+            <a:ext cx="6906491" cy="2876897"/>
           </a:xfrm>
         </p:spPr>
         <p:txBody>
           <a:bodyPr anchor="ctr">
-            <a:normAutofit/>
+            <a:normAutofit lnSpcReduction="10000"/>
           </a:bodyPr>
           <a:lstStyle/>
           <a:p>
@@ -4546,10 +5176,10 @@
               <a:buChar char="-"/>
             </a:pPr>
             <a:r>
-              <a:rPr lang="hu-HU" dirty="0"/>
+              <a:rPr lang="hu-HU" sz="2400" dirty="0"/>
               <a:t>Probléma: A feladatok kezelése gyakran átláthatatlan.</a:t>
             </a:r>
-            <a:endParaRPr lang="en-US" dirty="0"/>
+            <a:endParaRPr lang="en-US" sz="2400" dirty="0"/>
           </a:p>
           <a:p>
             <a:pPr>
@@ -4557,10 +5187,10 @@
               <a:buChar char="-"/>
             </a:pPr>
             <a:r>
-              <a:rPr lang="hu-HU" dirty="0"/>
+              <a:rPr lang="hu-HU" sz="2400" dirty="0"/>
               <a:t>Probléma: Több különálló alkalmazásra van szükség.</a:t>
             </a:r>
-            <a:endParaRPr lang="en-US" dirty="0"/>
+            <a:endParaRPr lang="en-US" sz="2400" dirty="0"/>
           </a:p>
           <a:p>
             <a:pPr>
@@ -4568,18 +5198,18 @@
               <a:buChar char="-"/>
             </a:pPr>
             <a:r>
-              <a:rPr lang="hu-HU" dirty="0"/>
+              <a:rPr lang="hu-HU" sz="2400" dirty="0"/>
               <a:t>Megoldás: </a:t>
             </a:r>
             <a:r>
-              <a:rPr lang="hu-HU" dirty="0" err="1"/>
+              <a:rPr lang="hu-HU" sz="2400" dirty="0" err="1"/>
               <a:t>Calentasker</a:t>
             </a:r>
             <a:r>
-              <a:rPr lang="hu-HU" dirty="0"/>
+              <a:rPr lang="hu-HU" sz="2400" dirty="0"/>
               <a:t> - központi platform a teendőkhöz.</a:t>
             </a:r>
-            <a:endParaRPr lang="en-US" dirty="0"/>
+            <a:endParaRPr lang="en-US" sz="2400" dirty="0"/>
           </a:p>
           <a:p>
             <a:pPr>
@@ -4587,10 +5217,10 @@
               <a:buChar char="-"/>
             </a:pPr>
             <a:r>
-              <a:rPr lang="hu-HU" dirty="0"/>
+              <a:rPr lang="hu-HU" sz="2400" dirty="0"/>
               <a:t>Személyes és csoportos feladatok egy helyen.</a:t>
             </a:r>
-            <a:endParaRPr lang="en-US" dirty="0"/>
+            <a:endParaRPr lang="en-US" sz="2400" dirty="0"/>
           </a:p>
           <a:p>
             <a:pPr>
@@ -4598,10 +5228,10 @@
               <a:buChar char="-"/>
             </a:pPr>
             <a:r>
-              <a:rPr lang="hu-HU" dirty="0"/>
+              <a:rPr lang="hu-HU" sz="2400" dirty="0"/>
               <a:t>Zökkenőmentes csoportos együttműködés.</a:t>
             </a:r>
-            <a:endParaRPr lang="en-US" dirty="0"/>
+            <a:endParaRPr lang="en-US" sz="2400" dirty="0"/>
           </a:p>
         </p:txBody>
       </p:sp>
@@ -4937,31 +5567,81 @@
           </a:p>
         </p:txBody>
       </p:sp>
-      <p:sp>
-        <p:nvSpPr>
-          <p:cNvPr id="3" name="Tartalom helye 2">
-            <a:extLst>
-              <a:ext uri="{FF2B5EF4-FFF2-40B4-BE49-F238E27FC236}">
-                <a16:creationId xmlns:a16="http://schemas.microsoft.com/office/drawing/2014/main" id="{C8EC822B-CD46-3AC1-1250-432F0FBE1123}"/>
-              </a:ext>
-            </a:extLst>
-          </p:cNvPr>
-          <p:cNvSpPr>
-            <a:spLocks noGrp="1"/>
-          </p:cNvSpPr>
-          <p:nvPr>
-            <p:ph idx="1"/>
-          </p:nvPr>
-        </p:nvSpPr>
+      <p:pic>
+        <p:nvPicPr>
+          <p:cNvPr id="5" name="Kép 4">
+            <a:extLst>
+              <a:ext uri="{FF2B5EF4-FFF2-40B4-BE49-F238E27FC236}">
+                <a16:creationId xmlns:a16="http://schemas.microsoft.com/office/drawing/2014/main" id="{4C133509-C5A5-4B10-8D2A-A46567FDAA58}"/>
+              </a:ext>
+            </a:extLst>
+          </p:cNvPr>
+          <p:cNvPicPr>
+            <a:picLocks noChangeAspect="1"/>
+          </p:cNvPicPr>
+          <p:nvPr/>
+        </p:nvPicPr>
+        <p:blipFill>
+          <a:blip r:embed="rId2"/>
+          <a:stretch>
+            <a:fillRect/>
+          </a:stretch>
+        </p:blipFill>
         <p:spPr>
           <a:xfrm>
-            <a:off x="4447308" y="591344"/>
-            <a:ext cx="6906491" cy="5585619"/>
+            <a:off x="4174855" y="61071"/>
+            <a:ext cx="5630944" cy="2573391"/>
+          </a:xfrm>
+          <a:prstGeom prst="rect">
+            <a:avLst/>
+          </a:prstGeom>
+          <a:ln w="47625">
+            <a:gradFill>
+              <a:gsLst>
+                <a:gs pos="0">
+                  <a:schemeClr val="accent2"/>
+                </a:gs>
+                <a:gs pos="94000">
+                  <a:schemeClr val="bg1">
+                    <a:alpha val="0"/>
+                  </a:schemeClr>
+                </a:gs>
+                <a:gs pos="100000">
+                  <a:schemeClr val="bg1">
+                    <a:alpha val="0"/>
+                  </a:schemeClr>
+                </a:gs>
+              </a:gsLst>
+              <a:lin ang="4200000" scaled="0"/>
+            </a:gradFill>
+          </a:ln>
+        </p:spPr>
+      </p:pic>
+      <p:sp>
+        <p:nvSpPr>
+          <p:cNvPr id="3" name="Tartalom helye 2">
+            <a:extLst>
+              <a:ext uri="{FF2B5EF4-FFF2-40B4-BE49-F238E27FC236}">
+                <a16:creationId xmlns:a16="http://schemas.microsoft.com/office/drawing/2014/main" id="{C8EC822B-CD46-3AC1-1250-432F0FBE1123}"/>
+              </a:ext>
+            </a:extLst>
+          </p:cNvPr>
+          <p:cNvSpPr>
+            <a:spLocks noGrp="1"/>
+          </p:cNvSpPr>
+          <p:nvPr>
+            <p:ph idx="1"/>
+          </p:nvPr>
+        </p:nvSpPr>
+        <p:spPr>
+          <a:xfrm>
+            <a:off x="4447309" y="3714161"/>
+            <a:ext cx="5893896" cy="2462801"/>
           </a:xfrm>
         </p:spPr>
         <p:txBody>
           <a:bodyPr anchor="ctr">
-            <a:normAutofit/>
+            <a:normAutofit fontScale="85000" lnSpcReduction="20000"/>
           </a:bodyPr>
           <a:lstStyle/>
           <a:p>
@@ -5092,6 +5772,58 @@
           </a:p>
         </p:txBody>
       </p:sp>
+      <p:pic>
+        <p:nvPicPr>
+          <p:cNvPr id="7" name="Kép 6">
+            <a:extLst>
+              <a:ext uri="{FF2B5EF4-FFF2-40B4-BE49-F238E27FC236}">
+                <a16:creationId xmlns:a16="http://schemas.microsoft.com/office/drawing/2014/main" id="{4FD448E6-1495-479B-94C6-028E827A36F6}"/>
+              </a:ext>
+            </a:extLst>
+          </p:cNvPr>
+          <p:cNvPicPr>
+            <a:picLocks noChangeAspect="1"/>
+          </p:cNvPicPr>
+          <p:nvPr/>
+        </p:nvPicPr>
+        <p:blipFill>
+          <a:blip r:embed="rId3"/>
+          <a:stretch>
+            <a:fillRect/>
+          </a:stretch>
+        </p:blipFill>
+        <p:spPr>
+          <a:xfrm>
+            <a:off x="6358845" y="1140770"/>
+            <a:ext cx="5618131" cy="2573391"/>
+          </a:xfrm>
+          <a:prstGeom prst="rect">
+            <a:avLst/>
+          </a:prstGeom>
+          <a:ln w="41275">
+            <a:gradFill>
+              <a:gsLst>
+                <a:gs pos="0">
+                  <a:schemeClr val="accent1">
+                    <a:lumMod val="5000"/>
+                    <a:lumOff val="95000"/>
+                    <a:alpha val="0"/>
+                  </a:schemeClr>
+                </a:gs>
+                <a:gs pos="18000">
+                  <a:srgbClr val="EB9568">
+                    <a:alpha val="0"/>
+                  </a:srgbClr>
+                </a:gs>
+                <a:gs pos="100000">
+                  <a:schemeClr val="accent2"/>
+                </a:gs>
+              </a:gsLst>
+              <a:lin ang="3600000" scaled="0"/>
+            </a:gradFill>
+          </a:ln>
+        </p:spPr>
+      </p:pic>
     </p:spTree>
     <p:extLst>
       <p:ext uri="{BB962C8B-B14F-4D97-AF65-F5344CB8AC3E}">
@@ -5424,31 +6156,131 @@
           </a:p>
         </p:txBody>
       </p:sp>
-      <p:sp>
-        <p:nvSpPr>
-          <p:cNvPr id="3" name="Tartalom helye 2">
-            <a:extLst>
-              <a:ext uri="{FF2B5EF4-FFF2-40B4-BE49-F238E27FC236}">
-                <a16:creationId xmlns:a16="http://schemas.microsoft.com/office/drawing/2014/main" id="{FE7EE2D2-F64A-CEF6-8DF3-AF3F997CACF6}"/>
-              </a:ext>
-            </a:extLst>
-          </p:cNvPr>
-          <p:cNvSpPr>
-            <a:spLocks noGrp="1"/>
-          </p:cNvSpPr>
-          <p:nvPr>
-            <p:ph idx="1"/>
-          </p:nvPr>
-        </p:nvSpPr>
+      <p:pic>
+        <p:nvPicPr>
+          <p:cNvPr id="5" name="Kép 4">
+            <a:extLst>
+              <a:ext uri="{FF2B5EF4-FFF2-40B4-BE49-F238E27FC236}">
+                <a16:creationId xmlns:a16="http://schemas.microsoft.com/office/drawing/2014/main" id="{79494EE7-4E52-4345-9C63-BBC578C0B0C6}"/>
+              </a:ext>
+            </a:extLst>
+          </p:cNvPr>
+          <p:cNvPicPr>
+            <a:picLocks noChangeAspect="1"/>
+          </p:cNvPicPr>
+          <p:nvPr/>
+        </p:nvPicPr>
+        <p:blipFill>
+          <a:blip r:embed="rId2"/>
+          <a:stretch>
+            <a:fillRect/>
+          </a:stretch>
+        </p:blipFill>
         <p:spPr>
           <a:xfrm>
-            <a:off x="4447308" y="591344"/>
-            <a:ext cx="6906491" cy="5585619"/>
+            <a:off x="6179140" y="176100"/>
+            <a:ext cx="5574906" cy="2565212"/>
+          </a:xfrm>
+          <a:prstGeom prst="rect">
+            <a:avLst/>
+          </a:prstGeom>
+          <a:ln w="47625">
+            <a:gradFill>
+              <a:gsLst>
+                <a:gs pos="0">
+                  <a:schemeClr val="bg1">
+                    <a:alpha val="0"/>
+                  </a:schemeClr>
+                </a:gs>
+                <a:gs pos="0">
+                  <a:schemeClr val="bg1">
+                    <a:alpha val="0"/>
+                  </a:schemeClr>
+                </a:gs>
+                <a:gs pos="100000">
+                  <a:schemeClr val="accent2"/>
+                </a:gs>
+              </a:gsLst>
+              <a:lin ang="18000000" scaled="0"/>
+            </a:gradFill>
+          </a:ln>
+        </p:spPr>
+      </p:pic>
+      <p:pic>
+        <p:nvPicPr>
+          <p:cNvPr id="7" name="Kép 6">
+            <a:extLst>
+              <a:ext uri="{FF2B5EF4-FFF2-40B4-BE49-F238E27FC236}">
+                <a16:creationId xmlns:a16="http://schemas.microsoft.com/office/drawing/2014/main" id="{11E981F4-BC69-4490-89DE-EECDBF594C0E}"/>
+              </a:ext>
+            </a:extLst>
+          </p:cNvPr>
+          <p:cNvPicPr>
+            <a:picLocks noChangeAspect="1"/>
+          </p:cNvPicPr>
+          <p:nvPr/>
+        </p:nvPicPr>
+        <p:blipFill>
+          <a:blip r:embed="rId3"/>
+          <a:stretch>
+            <a:fillRect/>
+          </a:stretch>
+        </p:blipFill>
+        <p:spPr>
+          <a:xfrm>
+            <a:off x="4251682" y="1331560"/>
+            <a:ext cx="5543499" cy="2533428"/>
+          </a:xfrm>
+          <a:prstGeom prst="rect">
+            <a:avLst/>
+          </a:prstGeom>
+          <a:ln w="47625">
+            <a:gradFill>
+              <a:gsLst>
+                <a:gs pos="27000">
+                  <a:srgbClr val="FDF0E9">
+                    <a:alpha val="0"/>
+                  </a:srgbClr>
+                </a:gs>
+                <a:gs pos="0">
+                  <a:schemeClr val="bg1">
+                    <a:alpha val="0"/>
+                  </a:schemeClr>
+                </a:gs>
+                <a:gs pos="100000">
+                  <a:schemeClr val="accent2"/>
+                </a:gs>
+              </a:gsLst>
+              <a:lin ang="7200000" scaled="0"/>
+            </a:gradFill>
+          </a:ln>
+        </p:spPr>
+      </p:pic>
+      <p:sp>
+        <p:nvSpPr>
+          <p:cNvPr id="3" name="Tartalom helye 2">
+            <a:extLst>
+              <a:ext uri="{FF2B5EF4-FFF2-40B4-BE49-F238E27FC236}">
+                <a16:creationId xmlns:a16="http://schemas.microsoft.com/office/drawing/2014/main" id="{FE7EE2D2-F64A-CEF6-8DF3-AF3F997CACF6}"/>
+              </a:ext>
+            </a:extLst>
+          </p:cNvPr>
+          <p:cNvSpPr>
+            <a:spLocks noGrp="1"/>
+          </p:cNvSpPr>
+          <p:nvPr>
+            <p:ph idx="1"/>
+          </p:nvPr>
+        </p:nvSpPr>
+        <p:spPr>
+          <a:xfrm>
+            <a:off x="4447309" y="3893269"/>
+            <a:ext cx="6035298" cy="2283693"/>
           </a:xfrm>
         </p:spPr>
         <p:txBody>
           <a:bodyPr anchor="ctr">
-            <a:normAutofit/>
+            <a:normAutofit fontScale="92500" lnSpcReduction="20000"/>
           </a:bodyPr>
           <a:lstStyle/>
           <a:p>
@@ -5859,7 +6691,7 @@
         <p:spPr>
           <a:xfrm>
             <a:off x="4447308" y="591344"/>
-            <a:ext cx="6906491" cy="5585619"/>
+            <a:ext cx="6906491" cy="3138219"/>
           </a:xfrm>
         </p:spPr>
         <p:txBody>
@@ -5961,6 +6793,149 @@
           </a:p>
         </p:txBody>
       </p:sp>
+      <p:pic>
+        <p:nvPicPr>
+          <p:cNvPr id="1026" name="Picture 2" descr="Python (programming language) - Wikipedia">
+            <a:extLst>
+              <a:ext uri="{FF2B5EF4-FFF2-40B4-BE49-F238E27FC236}">
+                <a16:creationId xmlns:a16="http://schemas.microsoft.com/office/drawing/2014/main" id="{1B1D6C10-5F81-4232-B98A-B5B8D013E8F9}"/>
+              </a:ext>
+            </a:extLst>
+          </p:cNvPr>
+          <p:cNvPicPr>
+            <a:picLocks noChangeAspect="1" noChangeArrowheads="1"/>
+          </p:cNvPicPr>
+          <p:nvPr/>
+        </p:nvPicPr>
+        <p:blipFill>
+          <a:blip r:embed="rId2">
+            <a:extLst>
+              <a:ext uri="{28A0092B-C50C-407E-A947-70E740481C1C}">
+                <a14:useLocalDpi xmlns:a14="http://schemas.microsoft.com/office/drawing/2010/main" val="0"/>
+              </a:ext>
+            </a:extLst>
+          </a:blip>
+          <a:srcRect/>
+          <a:stretch>
+            <a:fillRect/>
+          </a:stretch>
+        </p:blipFill>
+        <p:spPr bwMode="auto">
+          <a:xfrm>
+            <a:off x="2592994" y="4488008"/>
+            <a:ext cx="1574276" cy="1574276"/>
+          </a:xfrm>
+          <a:prstGeom prst="rect">
+            <a:avLst/>
+          </a:prstGeom>
+          <a:noFill/>
+          <a:extLst>
+            <a:ext uri="{909E8E84-426E-40DD-AFC4-6F175D3DCCD1}">
+              <a14:hiddenFill xmlns:a14="http://schemas.microsoft.com/office/drawing/2010/main">
+                <a:solidFill>
+                  <a:srgbClr val="FFFFFF"/>
+                </a:solidFill>
+              </a14:hiddenFill>
+            </a:ext>
+          </a:extLst>
+        </p:spPr>
+      </p:pic>
+      <p:pic>
+        <p:nvPicPr>
+          <p:cNvPr id="1030" name="Picture 6" descr="Django REST framework">
+            <a:extLst>
+              <a:ext uri="{FF2B5EF4-FFF2-40B4-BE49-F238E27FC236}">
+                <a16:creationId xmlns:a16="http://schemas.microsoft.com/office/drawing/2014/main" id="{4F3CE805-A34D-48D0-B760-52231DEDFF3F}"/>
+              </a:ext>
+            </a:extLst>
+          </p:cNvPr>
+          <p:cNvPicPr>
+            <a:picLocks noChangeAspect="1" noChangeArrowheads="1"/>
+          </p:cNvPicPr>
+          <p:nvPr/>
+        </p:nvPicPr>
+        <p:blipFill>
+          <a:blip r:embed="rId3">
+            <a:extLst>
+              <a:ext uri="{28A0092B-C50C-407E-A947-70E740481C1C}">
+                <a14:useLocalDpi xmlns:a14="http://schemas.microsoft.com/office/drawing/2010/main" val="0"/>
+              </a:ext>
+            </a:extLst>
+          </a:blip>
+          <a:srcRect/>
+          <a:stretch>
+            <a:fillRect/>
+          </a:stretch>
+        </p:blipFill>
+        <p:spPr bwMode="auto">
+          <a:xfrm>
+            <a:off x="7968684" y="4403947"/>
+            <a:ext cx="3944234" cy="1742398"/>
+          </a:xfrm>
+          <a:prstGeom prst="rect">
+            <a:avLst/>
+          </a:prstGeom>
+          <a:noFill/>
+          <a:extLst>
+            <a:ext uri="{909E8E84-426E-40DD-AFC4-6F175D3DCCD1}">
+              <a14:hiddenFill xmlns:a14="http://schemas.microsoft.com/office/drawing/2010/main">
+                <a:solidFill>
+                  <a:srgbClr val="FFFFFF"/>
+                </a:solidFill>
+              </a14:hiddenFill>
+            </a:ext>
+          </a:extLst>
+        </p:spPr>
+      </p:pic>
+      <p:pic>
+        <p:nvPicPr>
+          <p:cNvPr id="5" name="Kép 4">
+            <a:extLst>
+              <a:ext uri="{FF2B5EF4-FFF2-40B4-BE49-F238E27FC236}">
+                <a16:creationId xmlns:a16="http://schemas.microsoft.com/office/drawing/2014/main" id="{F2571F20-B508-4A6E-BC77-5F5C9CA15658}"/>
+              </a:ext>
+            </a:extLst>
+          </p:cNvPr>
+          <p:cNvPicPr>
+            <a:picLocks noChangeAspect="1"/>
+          </p:cNvPicPr>
+          <p:nvPr/>
+        </p:nvPicPr>
+        <p:blipFill>
+          <a:blip r:embed="rId4"/>
+          <a:stretch>
+            <a:fillRect/>
+          </a:stretch>
+        </p:blipFill>
+        <p:spPr>
+          <a:xfrm>
+            <a:off x="4447308" y="4048651"/>
+            <a:ext cx="3897631" cy="2490261"/>
+          </a:xfrm>
+          <a:prstGeom prst="rect">
+            <a:avLst/>
+          </a:prstGeom>
+          <a:ln w="47625">
+            <a:gradFill>
+              <a:gsLst>
+                <a:gs pos="0">
+                  <a:schemeClr val="accent2"/>
+                </a:gs>
+                <a:gs pos="50000">
+                  <a:schemeClr val="bg1">
+                    <a:lumMod val="0"/>
+                    <a:lumOff val="100000"/>
+                  </a:schemeClr>
+                </a:gs>
+                <a:gs pos="100000">
+                  <a:schemeClr val="accent2"/>
+                </a:gs>
+              </a:gsLst>
+              <a:lin ang="12600000" scaled="0"/>
+            </a:gradFill>
+          </a:ln>
+        </p:spPr>
+      </p:pic>
     </p:spTree>
     <p:extLst>
       <p:ext uri="{BB962C8B-B14F-4D97-AF65-F5344CB8AC3E}">
@@ -6293,31 +7268,61 @@
           </a:p>
         </p:txBody>
       </p:sp>
-      <p:sp>
-        <p:nvSpPr>
-          <p:cNvPr id="3" name="Tartalom helye 2">
-            <a:extLst>
-              <a:ext uri="{FF2B5EF4-FFF2-40B4-BE49-F238E27FC236}">
-                <a16:creationId xmlns:a16="http://schemas.microsoft.com/office/drawing/2014/main" id="{C7A211F6-D959-7B64-B84F-C736A25B9A24}"/>
-              </a:ext>
-            </a:extLst>
-          </p:cNvPr>
-          <p:cNvSpPr>
-            <a:spLocks noGrp="1"/>
-          </p:cNvSpPr>
-          <p:nvPr>
-            <p:ph idx="1"/>
-          </p:nvPr>
-        </p:nvSpPr>
+      <p:pic>
+        <p:nvPicPr>
+          <p:cNvPr id="5" name="Kép 4">
+            <a:extLst>
+              <a:ext uri="{FF2B5EF4-FFF2-40B4-BE49-F238E27FC236}">
+                <a16:creationId xmlns:a16="http://schemas.microsoft.com/office/drawing/2014/main" id="{195F3D4B-91B5-4A10-9F82-338663DEA027}"/>
+              </a:ext>
+            </a:extLst>
+          </p:cNvPr>
+          <p:cNvPicPr>
+            <a:picLocks noChangeAspect="1"/>
+          </p:cNvPicPr>
+          <p:nvPr/>
+        </p:nvPicPr>
+        <p:blipFill>
+          <a:blip r:embed="rId2"/>
+          <a:stretch>
+            <a:fillRect/>
+          </a:stretch>
+        </p:blipFill>
         <p:spPr>
           <a:xfrm>
-            <a:off x="4447308" y="591344"/>
-            <a:ext cx="6906491" cy="5585619"/>
+            <a:off x="6673563" y="221326"/>
+            <a:ext cx="5515389" cy="4468305"/>
+          </a:xfrm>
+          <a:prstGeom prst="rect">
+            <a:avLst/>
+          </a:prstGeom>
+        </p:spPr>
+      </p:pic>
+      <p:sp>
+        <p:nvSpPr>
+          <p:cNvPr id="3" name="Tartalom helye 2">
+            <a:extLst>
+              <a:ext uri="{FF2B5EF4-FFF2-40B4-BE49-F238E27FC236}">
+                <a16:creationId xmlns:a16="http://schemas.microsoft.com/office/drawing/2014/main" id="{C7A211F6-D959-7B64-B84F-C736A25B9A24}"/>
+              </a:ext>
+            </a:extLst>
+          </p:cNvPr>
+          <p:cNvSpPr>
+            <a:spLocks noGrp="1"/>
+          </p:cNvSpPr>
+          <p:nvPr>
+            <p:ph idx="1"/>
+          </p:nvPr>
+        </p:nvSpPr>
+        <p:spPr>
+          <a:xfrm>
+            <a:off x="4447309" y="3648173"/>
+            <a:ext cx="6629186" cy="2528790"/>
           </a:xfrm>
         </p:spPr>
         <p:txBody>
           <a:bodyPr anchor="ctr">
-            <a:normAutofit/>
+            <a:normAutofit fontScale="92500" lnSpcReduction="20000"/>
           </a:bodyPr>
           <a:lstStyle/>
           <a:p>
@@ -6805,13 +7810,13 @@
         </p:nvSpPr>
         <p:spPr>
           <a:xfrm>
-            <a:off x="4447308" y="591344"/>
-            <a:ext cx="6906491" cy="5585619"/>
+            <a:off x="4447309" y="3610465"/>
+            <a:ext cx="5705359" cy="2566497"/>
           </a:xfrm>
         </p:spPr>
         <p:txBody>
           <a:bodyPr anchor="ctr">
-            <a:normAutofit/>
+            <a:normAutofit lnSpcReduction="10000"/>
           </a:bodyPr>
           <a:lstStyle/>
           <a:p>
@@ -6900,6 +7905,98 @@
           </a:p>
         </p:txBody>
       </p:sp>
+      <p:pic>
+        <p:nvPicPr>
+          <p:cNvPr id="5" name="Kép 4">
+            <a:extLst>
+              <a:ext uri="{FF2B5EF4-FFF2-40B4-BE49-F238E27FC236}">
+                <a16:creationId xmlns:a16="http://schemas.microsoft.com/office/drawing/2014/main" id="{22B99A5D-E50A-4F81-BFBB-2C824E3F2E96}"/>
+              </a:ext>
+            </a:extLst>
+          </p:cNvPr>
+          <p:cNvPicPr>
+            <a:picLocks noChangeAspect="1"/>
+          </p:cNvPicPr>
+          <p:nvPr/>
+        </p:nvPicPr>
+        <p:blipFill>
+          <a:blip r:embed="rId2"/>
+          <a:stretch>
+            <a:fillRect/>
+          </a:stretch>
+        </p:blipFill>
+        <p:spPr>
+          <a:xfrm>
+            <a:off x="7982815" y="82559"/>
+            <a:ext cx="3846646" cy="3346441"/>
+          </a:xfrm>
+          <a:prstGeom prst="rect">
+            <a:avLst/>
+          </a:prstGeom>
+          <a:ln w="47625">
+            <a:gradFill>
+              <a:gsLst>
+                <a:gs pos="0">
+                  <a:schemeClr val="accent1">
+                    <a:lumMod val="5000"/>
+                    <a:lumOff val="95000"/>
+                  </a:schemeClr>
+                </a:gs>
+                <a:gs pos="100000">
+                  <a:schemeClr val="accent2"/>
+                </a:gs>
+              </a:gsLst>
+              <a:lin ang="0" scaled="0"/>
+            </a:gradFill>
+          </a:ln>
+        </p:spPr>
+      </p:pic>
+      <p:pic>
+        <p:nvPicPr>
+          <p:cNvPr id="7" name="Kép 6">
+            <a:extLst>
+              <a:ext uri="{FF2B5EF4-FFF2-40B4-BE49-F238E27FC236}">
+                <a16:creationId xmlns:a16="http://schemas.microsoft.com/office/drawing/2014/main" id="{D3B2F16C-7DF1-4D39-9529-56DB21C9359F}"/>
+              </a:ext>
+            </a:extLst>
+          </p:cNvPr>
+          <p:cNvPicPr>
+            <a:picLocks noChangeAspect="1"/>
+          </p:cNvPicPr>
+          <p:nvPr/>
+        </p:nvPicPr>
+        <p:blipFill>
+          <a:blip r:embed="rId3"/>
+          <a:stretch>
+            <a:fillRect/>
+          </a:stretch>
+        </p:blipFill>
+        <p:spPr>
+          <a:xfrm>
+            <a:off x="4447309" y="82241"/>
+            <a:ext cx="3846646" cy="3346759"/>
+          </a:xfrm>
+          <a:prstGeom prst="rect">
+            <a:avLst/>
+          </a:prstGeom>
+          <a:ln w="47625">
+            <a:gradFill>
+              <a:gsLst>
+                <a:gs pos="0">
+                  <a:schemeClr val="accent1">
+                    <a:lumMod val="5000"/>
+                    <a:lumOff val="95000"/>
+                  </a:schemeClr>
+                </a:gs>
+                <a:gs pos="100000">
+                  <a:schemeClr val="accent2"/>
+                </a:gs>
+              </a:gsLst>
+              <a:lin ang="10800000" scaled="0"/>
+            </a:gradFill>
+          </a:ln>
+        </p:spPr>
+      </p:pic>
     </p:spTree>
     <p:extLst>
       <p:ext uri="{BB962C8B-B14F-4D97-AF65-F5344CB8AC3E}">

--- a/Dokumentacio/Calentasker_bemutató.pptx
+++ b/Dokumentacio/Calentasker_bemutató.pptx
@@ -8347,8 +8347,8 @@
         </p:nvSpPr>
         <p:spPr>
           <a:xfrm>
-            <a:off x="4447308" y="591344"/>
-            <a:ext cx="6906491" cy="5585619"/>
+            <a:off x="4447308" y="591345"/>
+            <a:ext cx="6906491" cy="3509168"/>
           </a:xfrm>
         </p:spPr>
         <p:txBody>
@@ -8463,6 +8463,89 @@
           </a:p>
         </p:txBody>
       </p:sp>
+      <p:pic>
+        <p:nvPicPr>
+          <p:cNvPr id="6" name="Kép 5">
+            <a:extLst>
+              <a:ext uri="{FF2B5EF4-FFF2-40B4-BE49-F238E27FC236}">
+                <a16:creationId xmlns:a16="http://schemas.microsoft.com/office/drawing/2014/main" id="{2D2F2581-868C-4476-9315-E6840A827B68}"/>
+              </a:ext>
+            </a:extLst>
+          </p:cNvPr>
+          <p:cNvPicPr>
+            <a:picLocks noChangeAspect="1"/>
+          </p:cNvPicPr>
+          <p:nvPr/>
+        </p:nvPicPr>
+        <p:blipFill>
+          <a:blip r:embed="rId2">
+            <a:extLst>
+              <a:ext uri="{28A0092B-C50C-407E-A947-70E740481C1C}">
+                <a14:useLocalDpi xmlns:a14="http://schemas.microsoft.com/office/drawing/2010/main" val="0"/>
+              </a:ext>
+            </a:extLst>
+          </a:blip>
+          <a:stretch>
+            <a:fillRect/>
+          </a:stretch>
+        </p:blipFill>
+        <p:spPr>
+          <a:xfrm>
+            <a:off x="4273801" y="4100512"/>
+            <a:ext cx="2438400" cy="2438400"/>
+          </a:xfrm>
+          <a:prstGeom prst="rect">
+            <a:avLst/>
+          </a:prstGeom>
+        </p:spPr>
+      </p:pic>
+      <p:pic>
+        <p:nvPicPr>
+          <p:cNvPr id="2052" name="Picture 4" descr="bootstrap-icons - npm">
+            <a:extLst>
+              <a:ext uri="{FF2B5EF4-FFF2-40B4-BE49-F238E27FC236}">
+                <a16:creationId xmlns:a16="http://schemas.microsoft.com/office/drawing/2014/main" id="{FD05DBDD-2C19-431A-A2F5-96003BA413AA}"/>
+              </a:ext>
+            </a:extLst>
+          </p:cNvPr>
+          <p:cNvPicPr>
+            <a:picLocks noChangeAspect="1" noChangeArrowheads="1"/>
+          </p:cNvPicPr>
+          <p:nvPr/>
+        </p:nvPicPr>
+        <p:blipFill>
+          <a:blip r:embed="rId3">
+            <a:extLst>
+              <a:ext uri="{28A0092B-C50C-407E-A947-70E740481C1C}">
+                <a14:useLocalDpi xmlns:a14="http://schemas.microsoft.com/office/drawing/2010/main" val="0"/>
+              </a:ext>
+            </a:extLst>
+          </a:blip>
+          <a:srcRect/>
+          <a:stretch>
+            <a:fillRect/>
+          </a:stretch>
+        </p:blipFill>
+        <p:spPr bwMode="auto">
+          <a:xfrm>
+            <a:off x="6712201" y="4153069"/>
+            <a:ext cx="2828226" cy="2333286"/>
+          </a:xfrm>
+          <a:prstGeom prst="rect">
+            <a:avLst/>
+          </a:prstGeom>
+          <a:noFill/>
+          <a:extLst>
+            <a:ext uri="{909E8E84-426E-40DD-AFC4-6F175D3DCCD1}">
+              <a14:hiddenFill xmlns:a14="http://schemas.microsoft.com/office/drawing/2010/main">
+                <a:solidFill>
+                  <a:srgbClr val="FFFFFF"/>
+                </a:solidFill>
+              </a14:hiddenFill>
+            </a:ext>
+          </a:extLst>
+        </p:spPr>
+      </p:pic>
     </p:spTree>
     <p:extLst>
       <p:ext uri="{BB962C8B-B14F-4D97-AF65-F5344CB8AC3E}">
@@ -8819,12 +8902,12 @@
         <p:spPr>
           <a:xfrm>
             <a:off x="4447308" y="591344"/>
-            <a:ext cx="6906491" cy="5585619"/>
+            <a:ext cx="6906491" cy="3603285"/>
           </a:xfrm>
         </p:spPr>
         <p:txBody>
           <a:bodyPr anchor="ctr">
-            <a:normAutofit/>
+            <a:normAutofit lnSpcReduction="10000"/>
           </a:bodyPr>
           <a:lstStyle/>
           <a:p>
@@ -8908,6 +8991,89 @@
           </a:p>
         </p:txBody>
       </p:sp>
+      <p:pic>
+        <p:nvPicPr>
+          <p:cNvPr id="7" name="Kép 6">
+            <a:extLst>
+              <a:ext uri="{FF2B5EF4-FFF2-40B4-BE49-F238E27FC236}">
+                <a16:creationId xmlns:a16="http://schemas.microsoft.com/office/drawing/2014/main" id="{EF489A47-D9F1-4F28-9A91-2FE18F590CB7}"/>
+              </a:ext>
+            </a:extLst>
+          </p:cNvPr>
+          <p:cNvPicPr>
+            <a:picLocks noChangeAspect="1"/>
+          </p:cNvPicPr>
+          <p:nvPr/>
+        </p:nvPicPr>
+        <p:blipFill>
+          <a:blip r:embed="rId2">
+            <a:extLst>
+              <a:ext uri="{28A0092B-C50C-407E-A947-70E740481C1C}">
+                <a14:useLocalDpi xmlns:a14="http://schemas.microsoft.com/office/drawing/2010/main" val="0"/>
+              </a:ext>
+            </a:extLst>
+          </a:blip>
+          <a:stretch>
+            <a:fillRect/>
+          </a:stretch>
+        </p:blipFill>
+        <p:spPr>
+          <a:xfrm>
+            <a:off x="3887234" y="4079082"/>
+            <a:ext cx="2438400" cy="2438400"/>
+          </a:xfrm>
+          <a:prstGeom prst="rect">
+            <a:avLst/>
+          </a:prstGeom>
+        </p:spPr>
+      </p:pic>
+      <p:pic>
+        <p:nvPicPr>
+          <p:cNvPr id="1030" name="Picture 6">
+            <a:extLst>
+              <a:ext uri="{FF2B5EF4-FFF2-40B4-BE49-F238E27FC236}">
+                <a16:creationId xmlns:a16="http://schemas.microsoft.com/office/drawing/2014/main" id="{7BE3D1EC-37CC-4C6C-9906-D5F291E929E9}"/>
+              </a:ext>
+            </a:extLst>
+          </p:cNvPr>
+          <p:cNvPicPr>
+            <a:picLocks noChangeAspect="1" noChangeArrowheads="1"/>
+          </p:cNvPicPr>
+          <p:nvPr/>
+        </p:nvPicPr>
+        <p:blipFill>
+          <a:blip r:embed="rId3">
+            <a:extLst>
+              <a:ext uri="{28A0092B-C50C-407E-A947-70E740481C1C}">
+                <a14:useLocalDpi xmlns:a14="http://schemas.microsoft.com/office/drawing/2010/main" val="0"/>
+              </a:ext>
+            </a:extLst>
+          </a:blip>
+          <a:srcRect/>
+          <a:stretch>
+            <a:fillRect/>
+          </a:stretch>
+        </p:blipFill>
+        <p:spPr bwMode="auto">
+          <a:xfrm>
+            <a:off x="6531915" y="4339684"/>
+            <a:ext cx="2104539" cy="2199228"/>
+          </a:xfrm>
+          <a:prstGeom prst="rect">
+            <a:avLst/>
+          </a:prstGeom>
+          <a:noFill/>
+          <a:extLst>
+            <a:ext uri="{909E8E84-426E-40DD-AFC4-6F175D3DCCD1}">
+              <a14:hiddenFill xmlns:a14="http://schemas.microsoft.com/office/drawing/2010/main">
+                <a:solidFill>
+                  <a:srgbClr val="FFFFFF"/>
+                </a:solidFill>
+              </a14:hiddenFill>
+            </a:ext>
+          </a:extLst>
+        </p:spPr>
+      </p:pic>
     </p:spTree>
     <p:extLst>
       <p:ext uri="{BB962C8B-B14F-4D97-AF65-F5344CB8AC3E}">

--- a/Dokumentacio/Calentasker_bemutató.pptx
+++ b/Dokumentacio/Calentasker_bemutató.pptx
@@ -4562,6 +4562,9 @@
   <p:clrMapOvr>
     <a:masterClrMapping/>
   </p:clrMapOvr>
+  <p:transition spd="slow">
+    <p:wipe/>
+  </p:transition>
   <p:timing>
     <p:tnLst>
       <p:par>
@@ -4737,6 +4740,9 @@
   <p:clrMapOvr>
     <a:masterClrMapping/>
   </p:clrMapOvr>
+  <p:transition spd="slow">
+    <p:wipe/>
+  </p:transition>
 </p:sld>
 </file>
 
@@ -5245,6 +5251,9 @@
   <p:clrMapOvr>
     <a:masterClrMapping/>
   </p:clrMapOvr>
+  <p:transition spd="slow">
+    <p:wipe/>
+  </p:transition>
 </p:sld>
 </file>
 
@@ -5834,6 +5843,9 @@
   <p:clrMapOvr>
     <a:masterClrMapping/>
   </p:clrMapOvr>
+  <p:transition spd="slow">
+    <p:wipe/>
+  </p:transition>
 </p:sld>
 </file>
 
@@ -6350,6 +6362,9 @@
   <p:clrMapOvr>
     <a:masterClrMapping/>
   </p:clrMapOvr>
+  <p:transition spd="slow">
+    <p:wipe/>
+  </p:transition>
 </p:sld>
 </file>
 
@@ -6946,6 +6961,9 @@
   <p:clrMapOvr>
     <a:masterClrMapping/>
   </p:clrMapOvr>
+  <p:transition spd="slow">
+    <p:wipe/>
+  </p:transition>
 </p:sld>
 </file>
 
@@ -7470,6 +7488,9 @@
   <p:clrMapOvr>
     <a:masterClrMapping/>
   </p:clrMapOvr>
+  <p:transition spd="slow">
+    <p:wipe/>
+  </p:transition>
 </p:sld>
 </file>
 
@@ -8007,6 +8028,9 @@
   <p:clrMapOvr>
     <a:masterClrMapping/>
   </p:clrMapOvr>
+  <p:transition spd="slow">
+    <p:wipe/>
+  </p:transition>
 </p:sld>
 </file>
 
@@ -8556,6 +8580,9 @@
   <p:clrMapOvr>
     <a:masterClrMapping/>
   </p:clrMapOvr>
+  <p:transition spd="slow">
+    <p:wipe/>
+  </p:transition>
 </p:sld>
 </file>
 
@@ -9084,6 +9111,9 @@
   <p:clrMapOvr>
     <a:masterClrMapping/>
   </p:clrMapOvr>
+  <p:transition spd="slow">
+    <p:wipe/>
+  </p:transition>
 </p:sld>
 </file>
 
